--- a/hojas_de_datos/presentación.pptx
+++ b/hojas_de_datos/presentación.pptx
@@ -6,10 +6,11 @@
   </p:sldMasterIdLst>
   <p:sldIdLst>
     <p:sldId id="256" r:id="rId2"/>
-    <p:sldId id="259" r:id="rId3"/>
-    <p:sldId id="262" r:id="rId4"/>
-    <p:sldId id="261" r:id="rId5"/>
-    <p:sldId id="260" r:id="rId6"/>
+    <p:sldId id="263" r:id="rId3"/>
+    <p:sldId id="259" r:id="rId4"/>
+    <p:sldId id="262" r:id="rId5"/>
+    <p:sldId id="261" r:id="rId6"/>
+    <p:sldId id="260" r:id="rId7"/>
   </p:sldIdLst>
   <p:sldSz cx="12192000" cy="6858000"/>
   <p:notesSz cx="6858000" cy="9144000"/>
@@ -108,6 +109,11 @@
       </a:defRPr>
     </a:lvl9pPr>
   </p:defaultTextStyle>
+  <p:extLst>
+    <p:ext uri="{EFAFB233-063F-42B5-8137-9DF3F51BA10A}">
+      <p15:sldGuideLst xmlns:p15="http://schemas.microsoft.com/office/powerpoint/2012/main"/>
+    </p:ext>
+  </p:extLst>
 </p:presentation>
 </file>
 
@@ -258,7 +264,7 @@
           <a:p>
             <a:fld id="{6F783434-823D-4D47-95A2-ACDC8AEE4C3F}" type="datetimeFigureOut">
               <a:rPr lang="es-ES" smtClean="0"/>
-              <a:t>19/05/2026</a:t>
+              <a:t>20/05/2026</a:t>
             </a:fld>
             <a:endParaRPr lang="es-ES"/>
           </a:p>
@@ -456,7 +462,7 @@
           <a:p>
             <a:fld id="{6F783434-823D-4D47-95A2-ACDC8AEE4C3F}" type="datetimeFigureOut">
               <a:rPr lang="es-ES" smtClean="0"/>
-              <a:t>19/05/2026</a:t>
+              <a:t>20/05/2026</a:t>
             </a:fld>
             <a:endParaRPr lang="es-ES"/>
           </a:p>
@@ -664,7 +670,7 @@
           <a:p>
             <a:fld id="{6F783434-823D-4D47-95A2-ACDC8AEE4C3F}" type="datetimeFigureOut">
               <a:rPr lang="es-ES" smtClean="0"/>
-              <a:t>19/05/2026</a:t>
+              <a:t>20/05/2026</a:t>
             </a:fld>
             <a:endParaRPr lang="es-ES"/>
           </a:p>
@@ -862,7 +868,7 @@
           <a:p>
             <a:fld id="{6F783434-823D-4D47-95A2-ACDC8AEE4C3F}" type="datetimeFigureOut">
               <a:rPr lang="es-ES" smtClean="0"/>
-              <a:t>19/05/2026</a:t>
+              <a:t>20/05/2026</a:t>
             </a:fld>
             <a:endParaRPr lang="es-ES"/>
           </a:p>
@@ -1137,7 +1143,7 @@
           <a:p>
             <a:fld id="{6F783434-823D-4D47-95A2-ACDC8AEE4C3F}" type="datetimeFigureOut">
               <a:rPr lang="es-ES" smtClean="0"/>
-              <a:t>19/05/2026</a:t>
+              <a:t>20/05/2026</a:t>
             </a:fld>
             <a:endParaRPr lang="es-ES"/>
           </a:p>
@@ -1402,7 +1408,7 @@
           <a:p>
             <a:fld id="{6F783434-823D-4D47-95A2-ACDC8AEE4C3F}" type="datetimeFigureOut">
               <a:rPr lang="es-ES" smtClean="0"/>
-              <a:t>19/05/2026</a:t>
+              <a:t>20/05/2026</a:t>
             </a:fld>
             <a:endParaRPr lang="es-ES"/>
           </a:p>
@@ -1814,7 +1820,7 @@
           <a:p>
             <a:fld id="{6F783434-823D-4D47-95A2-ACDC8AEE4C3F}" type="datetimeFigureOut">
               <a:rPr lang="es-ES" smtClean="0"/>
-              <a:t>19/05/2026</a:t>
+              <a:t>20/05/2026</a:t>
             </a:fld>
             <a:endParaRPr lang="es-ES"/>
           </a:p>
@@ -1955,7 +1961,7 @@
           <a:p>
             <a:fld id="{6F783434-823D-4D47-95A2-ACDC8AEE4C3F}" type="datetimeFigureOut">
               <a:rPr lang="es-ES" smtClean="0"/>
-              <a:t>19/05/2026</a:t>
+              <a:t>20/05/2026</a:t>
             </a:fld>
             <a:endParaRPr lang="es-ES"/>
           </a:p>
@@ -2068,7 +2074,7 @@
           <a:p>
             <a:fld id="{6F783434-823D-4D47-95A2-ACDC8AEE4C3F}" type="datetimeFigureOut">
               <a:rPr lang="es-ES" smtClean="0"/>
-              <a:t>19/05/2026</a:t>
+              <a:t>20/05/2026</a:t>
             </a:fld>
             <a:endParaRPr lang="es-ES"/>
           </a:p>
@@ -2379,7 +2385,7 @@
           <a:p>
             <a:fld id="{6F783434-823D-4D47-95A2-ACDC8AEE4C3F}" type="datetimeFigureOut">
               <a:rPr lang="es-ES" smtClean="0"/>
-              <a:t>19/05/2026</a:t>
+              <a:t>20/05/2026</a:t>
             </a:fld>
             <a:endParaRPr lang="es-ES"/>
           </a:p>
@@ -2667,7 +2673,7 @@
           <a:p>
             <a:fld id="{6F783434-823D-4D47-95A2-ACDC8AEE4C3F}" type="datetimeFigureOut">
               <a:rPr lang="es-ES" smtClean="0"/>
-              <a:t>19/05/2026</a:t>
+              <a:t>20/05/2026</a:t>
             </a:fld>
             <a:endParaRPr lang="es-ES"/>
           </a:p>
@@ -2908,7 +2914,7 @@
           <a:p>
             <a:fld id="{6F783434-823D-4D47-95A2-ACDC8AEE4C3F}" type="datetimeFigureOut">
               <a:rPr lang="es-ES" smtClean="0"/>
-              <a:t>19/05/2026</a:t>
+              <a:t>20/05/2026</a:t>
             </a:fld>
             <a:endParaRPr lang="es-ES"/>
           </a:p>
@@ -3406,6 +3412,348 @@
         <p:cNvPr id="1" name="">
           <a:extLst>
             <a:ext uri="{FF2B5EF4-FFF2-40B4-BE49-F238E27FC236}">
+              <a16:creationId xmlns:a16="http://schemas.microsoft.com/office/drawing/2014/main" id="{69241AB1-1CC5-B2C9-2B38-F5234269BD57}"/>
+            </a:ext>
+          </a:extLst>
+        </p:cNvPr>
+        <p:cNvGrpSpPr/>
+        <p:nvPr/>
+      </p:nvGrpSpPr>
+      <p:grpSpPr>
+        <a:xfrm>
+          <a:off x="0" y="0"/>
+          <a:ext cx="0" cy="0"/>
+          <a:chOff x="0" y="0"/>
+          <a:chExt cx="0" cy="0"/>
+        </a:xfrm>
+      </p:grpSpPr>
+      <p:sp>
+        <p:nvSpPr>
+          <p:cNvPr id="2" name="Título 1">
+            <a:extLst>
+              <a:ext uri="{FF2B5EF4-FFF2-40B4-BE49-F238E27FC236}">
+                <a16:creationId xmlns:a16="http://schemas.microsoft.com/office/drawing/2014/main" id="{7BBEDC46-C93A-D41E-2855-3673F32ACD09}"/>
+              </a:ext>
+            </a:extLst>
+          </p:cNvPr>
+          <p:cNvSpPr>
+            <a:spLocks noGrp="1"/>
+          </p:cNvSpPr>
+          <p:nvPr>
+            <p:ph type="title"/>
+          </p:nvPr>
+        </p:nvSpPr>
+        <p:spPr>
+          <a:xfrm>
+            <a:off x="628650" y="469900"/>
+            <a:ext cx="10934700" cy="617537"/>
+          </a:xfrm>
+        </p:spPr>
+        <p:txBody>
+          <a:bodyPr>
+            <a:normAutofit fontScale="90000"/>
+          </a:bodyPr>
+          <a:lstStyle/>
+          <a:p>
+            <a:r>
+              <a:rPr lang="es-ES" sz="4200" dirty="0">
+                <a:latin typeface="Arial Rounded MT Bold" panose="020F0704030504030204" pitchFamily="34" charset="0"/>
+              </a:rPr>
+              <a:t>Modificaciones</a:t>
+            </a:r>
+          </a:p>
+        </p:txBody>
+      </p:sp>
+      <p:sp>
+        <p:nvSpPr>
+          <p:cNvPr id="3" name="Marcador de contenido 2">
+            <a:extLst>
+              <a:ext uri="{FF2B5EF4-FFF2-40B4-BE49-F238E27FC236}">
+                <a16:creationId xmlns:a16="http://schemas.microsoft.com/office/drawing/2014/main" id="{1B05A450-7A7C-286C-BCE8-608FB57A118A}"/>
+              </a:ext>
+            </a:extLst>
+          </p:cNvPr>
+          <p:cNvSpPr>
+            <a:spLocks noGrp="1"/>
+          </p:cNvSpPr>
+          <p:nvPr>
+            <p:ph idx="1"/>
+          </p:nvPr>
+        </p:nvSpPr>
+        <p:spPr>
+          <a:xfrm>
+            <a:off x="838200" y="1253330"/>
+            <a:ext cx="10515600" cy="5439569"/>
+          </a:xfrm>
+        </p:spPr>
+        <p:txBody>
+          <a:bodyPr>
+            <a:normAutofit/>
+          </a:bodyPr>
+          <a:lstStyle/>
+          <a:p>
+            <a:r>
+              <a:rPr lang="es-ES" dirty="0">
+                <a:latin typeface="Arial Rounded MT Bold" panose="020F0704030504030204" pitchFamily="34" charset="0"/>
+              </a:rPr>
+              <a:t>Perfiles:</a:t>
+            </a:r>
+          </a:p>
+          <a:p>
+            <a:pPr marL="0" indent="0" algn="just">
+              <a:lnSpc>
+                <a:spcPct val="100000"/>
+              </a:lnSpc>
+              <a:buNone/>
+            </a:pPr>
+            <a:r>
+              <a:rPr lang="es-ES" sz="1600" dirty="0">
+                <a:solidFill>
+                  <a:srgbClr val="0070C0"/>
+                </a:solidFill>
+                <a:latin typeface="Arial Rounded MT Bold" panose="020F0704030504030204" pitchFamily="34" charset="0"/>
+              </a:rPr>
+              <a:t>Los siguientes comportamientos de perfiles han sido añadidos/eliminados.</a:t>
+            </a:r>
+          </a:p>
+          <a:p>
+            <a:pPr algn="just">
+              <a:lnSpc>
+                <a:spcPct val="100000"/>
+              </a:lnSpc>
+            </a:pPr>
+            <a:r>
+              <a:rPr lang="es-ES" sz="1600" dirty="0">
+                <a:latin typeface="Arial Rounded MT Bold" panose="020F0704030504030204" pitchFamily="34" charset="0"/>
+              </a:rPr>
+              <a:t>Eliminados: </a:t>
+            </a:r>
+            <a:r>
+              <a:rPr lang="es-ES" sz="1600" dirty="0">
+                <a:solidFill>
+                  <a:srgbClr val="0070C0"/>
+                </a:solidFill>
+                <a:latin typeface="Arial Rounded MT Bold" panose="020F0704030504030204" pitchFamily="34" charset="0"/>
+              </a:rPr>
+              <a:t>ya no cuentan con un perfil que marque el comportamiento que pueden tener:</a:t>
+            </a:r>
+          </a:p>
+          <a:p>
+            <a:pPr marL="0" indent="0" algn="just">
+              <a:lnSpc>
+                <a:spcPct val="100000"/>
+              </a:lnSpc>
+              <a:buNone/>
+            </a:pPr>
+            <a:r>
+              <a:rPr lang="es-ES" sz="1600" dirty="0">
+                <a:solidFill>
+                  <a:srgbClr val="0070C0"/>
+                </a:solidFill>
+                <a:latin typeface="Arial Rounded MT Bold" panose="020F0704030504030204" pitchFamily="34" charset="0"/>
+              </a:rPr>
+              <a:t>Marruecos High y Low Flow</a:t>
+            </a:r>
+          </a:p>
+          <a:p>
+            <a:pPr marL="0" indent="0" algn="just">
+              <a:lnSpc>
+                <a:spcPct val="100000"/>
+              </a:lnSpc>
+              <a:buNone/>
+            </a:pPr>
+            <a:r>
+              <a:rPr lang="es-ES" sz="1600" dirty="0">
+                <a:solidFill>
+                  <a:srgbClr val="0070C0"/>
+                </a:solidFill>
+                <a:latin typeface="Arial Rounded MT Bold" panose="020F0704030504030204" pitchFamily="34" charset="0"/>
+              </a:rPr>
+              <a:t>CCGT España y Portugal</a:t>
+            </a:r>
+          </a:p>
+          <a:p>
+            <a:pPr algn="just">
+              <a:lnSpc>
+                <a:spcPct val="100000"/>
+              </a:lnSpc>
+            </a:pPr>
+            <a:r>
+              <a:rPr lang="es-ES" sz="1600" dirty="0">
+                <a:latin typeface="Arial Rounded MT Bold" panose="020F0704030504030204" pitchFamily="34" charset="0"/>
+              </a:rPr>
+              <a:t>Añadidos: </a:t>
+            </a:r>
+            <a:r>
+              <a:rPr lang="es-ES" sz="1600" dirty="0">
+                <a:solidFill>
+                  <a:srgbClr val="0070C0"/>
+                </a:solidFill>
+                <a:latin typeface="Arial Rounded MT Bold" panose="020F0704030504030204" pitchFamily="34" charset="0"/>
+              </a:rPr>
+              <a:t>cuentan con un perfil que marca su comportamiento</a:t>
+            </a:r>
+            <a:endParaRPr lang="es-ES" sz="1600" b="1" dirty="0">
+              <a:solidFill>
+                <a:srgbClr val="0070C0"/>
+              </a:solidFill>
+              <a:latin typeface="Arial Rounded MT Bold" panose="020F0704030504030204" pitchFamily="34" charset="0"/>
+            </a:endParaRPr>
+          </a:p>
+          <a:p>
+            <a:pPr marL="0" indent="0" algn="just">
+              <a:lnSpc>
+                <a:spcPct val="100000"/>
+              </a:lnSpc>
+              <a:buNone/>
+            </a:pPr>
+            <a:r>
+              <a:rPr lang="es-ES" sz="1600" dirty="0">
+                <a:solidFill>
+                  <a:srgbClr val="0070C0"/>
+                </a:solidFill>
+                <a:latin typeface="Arial Rounded MT Bold" panose="020F0704030504030204" pitchFamily="34" charset="0"/>
+              </a:rPr>
+              <a:t>Biomasa España y Portugal</a:t>
+            </a:r>
+          </a:p>
+          <a:p>
+            <a:pPr marL="0" indent="0" algn="just">
+              <a:lnSpc>
+                <a:spcPct val="100000"/>
+              </a:lnSpc>
+              <a:buNone/>
+            </a:pPr>
+            <a:r>
+              <a:rPr lang="es-ES" sz="1600" dirty="0">
+                <a:solidFill>
+                  <a:srgbClr val="0070C0"/>
+                </a:solidFill>
+                <a:latin typeface="Arial Rounded MT Bold" panose="020F0704030504030204" pitchFamily="34" charset="0"/>
+              </a:rPr>
+              <a:t>Desglose de la solar en España y Portugal: solar pv, thermal solar y rooftop solar.</a:t>
+            </a:r>
+          </a:p>
+          <a:p>
+            <a:pPr marL="0" indent="0" algn="just">
+              <a:lnSpc>
+                <a:spcPct val="100000"/>
+              </a:lnSpc>
+              <a:buNone/>
+            </a:pPr>
+            <a:r>
+              <a:rPr lang="es-ES" sz="1600" dirty="0">
+                <a:solidFill>
+                  <a:srgbClr val="0070C0"/>
+                </a:solidFill>
+                <a:latin typeface="Arial Rounded MT Bold" panose="020F0704030504030204" pitchFamily="34" charset="0"/>
+              </a:rPr>
+              <a:t>Desglose de la eólica en España  Portugal: wind offshore, wind onshore</a:t>
+            </a:r>
+          </a:p>
+          <a:p>
+            <a:pPr marL="0" indent="0" algn="just">
+              <a:lnSpc>
+                <a:spcPct val="100000"/>
+              </a:lnSpc>
+              <a:buNone/>
+            </a:pPr>
+            <a:r>
+              <a:rPr lang="es-ES" sz="1600" dirty="0">
+                <a:solidFill>
+                  <a:srgbClr val="0070C0"/>
+                </a:solidFill>
+                <a:latin typeface="Arial Rounded MT Bold" panose="020F0704030504030204" pitchFamily="34" charset="0"/>
+              </a:rPr>
+              <a:t>Pump y Turbina en España y Portugal</a:t>
+            </a:r>
+          </a:p>
+          <a:p>
+            <a:pPr marL="0" indent="0" algn="just">
+              <a:lnSpc>
+                <a:spcPct val="100000"/>
+              </a:lnSpc>
+              <a:buNone/>
+            </a:pPr>
+            <a:r>
+              <a:rPr lang="es-ES" sz="1600" dirty="0">
+                <a:solidFill>
+                  <a:srgbClr val="0070C0"/>
+                </a:solidFill>
+                <a:latin typeface="Arial Rounded MT Bold" panose="020F0704030504030204" pitchFamily="34" charset="0"/>
+              </a:rPr>
+              <a:t>Reservoir: installed capacity y available capacities.</a:t>
+            </a:r>
+          </a:p>
+          <a:p>
+            <a:pPr marL="0" indent="0" algn="just">
+              <a:lnSpc>
+                <a:spcPct val="100000"/>
+              </a:lnSpc>
+              <a:buNone/>
+            </a:pPr>
+            <a:r>
+              <a:rPr lang="es-ES" sz="1600" dirty="0">
+                <a:solidFill>
+                  <a:srgbClr val="0070C0"/>
+                </a:solidFill>
+                <a:latin typeface="Arial Rounded MT Bold" panose="020F0704030504030204" pitchFamily="34" charset="0"/>
+              </a:rPr>
+              <a:t>Irún </a:t>
+            </a:r>
+            <a:r>
+              <a:rPr lang="es-ES" sz="1600" dirty="0" err="1">
+                <a:solidFill>
+                  <a:srgbClr val="0070C0"/>
+                </a:solidFill>
+                <a:latin typeface="Arial Rounded MT Bold" panose="020F0704030504030204" pitchFamily="34" charset="0"/>
+              </a:rPr>
+              <a:t>Larrao</a:t>
+            </a:r>
+            <a:r>
+              <a:rPr lang="es-ES" sz="1600" dirty="0">
+                <a:solidFill>
+                  <a:srgbClr val="0070C0"/>
+                </a:solidFill>
+                <a:latin typeface="Arial Rounded MT Bold" panose="020F0704030504030204" pitchFamily="34" charset="0"/>
+              </a:rPr>
+              <a:t> obligación de cumplir con la interconexión que ocurre en el </a:t>
+            </a:r>
+          </a:p>
+          <a:p>
+            <a:pPr marL="0" indent="0" algn="just">
+              <a:buNone/>
+            </a:pPr>
+            <a:endParaRPr lang="es-ES" sz="1600" dirty="0">
+              <a:solidFill>
+                <a:srgbClr val="0070C0"/>
+              </a:solidFill>
+              <a:latin typeface="Arial Rounded MT Bold" panose="020F0704030504030204" pitchFamily="34" charset="0"/>
+            </a:endParaRPr>
+          </a:p>
+        </p:txBody>
+      </p:sp>
+    </p:spTree>
+    <p:extLst>
+      <p:ext uri="{BB962C8B-B14F-4D97-AF65-F5344CB8AC3E}">
+        <p14:creationId xmlns:p14="http://schemas.microsoft.com/office/powerpoint/2010/main" val="1954480569"/>
+      </p:ext>
+    </p:extLst>
+  </p:cSld>
+  <p:clrMapOvr>
+    <a:masterClrMapping/>
+  </p:clrMapOvr>
+</p:sld>
+</file>
+
+<file path=ppt/slides/slide3.xml><?xml version="1.0" encoding="utf-8"?>
+<p:sld xmlns:a="http://schemas.openxmlformats.org/drawingml/2006/main" xmlns:r="http://schemas.openxmlformats.org/officeDocument/2006/relationships" xmlns:p="http://schemas.openxmlformats.org/presentationml/2006/main">
+  <p:cSld>
+    <p:spTree>
+      <p:nvGrpSpPr>
+        <p:cNvPr id="1" name="">
+          <a:extLst>
+            <a:ext uri="{FF2B5EF4-FFF2-40B4-BE49-F238E27FC236}">
               <a16:creationId xmlns:a16="http://schemas.microsoft.com/office/drawing/2014/main" id="{0761F02F-64EB-0AA1-7EAC-13F49D57BC10}"/>
             </a:ext>
           </a:extLst>
@@ -3488,9 +3836,6 @@
           <a:p>
             <a:r>
               <a:rPr lang="es-ES" dirty="0">
-                <a:solidFill>
-                  <a:schemeClr val="accent2"/>
-                </a:solidFill>
                 <a:latin typeface="Arial Rounded MT Bold" panose="020F0704030504030204" pitchFamily="34" charset="0"/>
               </a:rPr>
               <a:t>Generación Extra – Demandas Extras:</a:t>
@@ -3646,7 +3991,7 @@
 </p:sld>
 </file>
 
-<file path=ppt/slides/slide3.xml><?xml version="1.0" encoding="utf-8"?>
+<file path=ppt/slides/slide4.xml><?xml version="1.0" encoding="utf-8"?>
 <p:sld xmlns:a="http://schemas.openxmlformats.org/drawingml/2006/main" xmlns:r="http://schemas.openxmlformats.org/officeDocument/2006/relationships" xmlns:p="http://schemas.openxmlformats.org/presentationml/2006/main">
   <p:cSld>
     <p:spTree>
@@ -3736,9 +4081,6 @@
           <a:p>
             <a:r>
               <a:rPr lang="es-ES" dirty="0">
-                <a:solidFill>
-                  <a:schemeClr val="accent2"/>
-                </a:solidFill>
                 <a:latin typeface="Arial Rounded MT Bold" panose="020F0704030504030204" pitchFamily="34" charset="0"/>
               </a:rPr>
               <a:t>Generación Extra – Demandas Extras:</a:t>
@@ -4420,12 +4762,30 @@
                         <a:buNone/>
                       </a:pPr>
                       <a:r>
-                        <a:rPr lang="es-ES" sz="1100" u="none" strike="noStrike">
+                        <a:rPr lang="es-ES" sz="1100" u="none" strike="noStrike" dirty="0">
                           <a:effectLst/>
                         </a:rPr>
-                        <a:t>H2 to eLiquids</a:t>
+                        <a:t>H2 </a:t>
                       </a:r>
-                      <a:endParaRPr lang="es-ES" sz="1100" b="0" i="0" u="none" strike="noStrike">
+                      <a:r>
+                        <a:rPr lang="es-ES" sz="1100" u="none" strike="noStrike" dirty="0" err="1">
+                          <a:effectLst/>
+                        </a:rPr>
+                        <a:t>to</a:t>
+                      </a:r>
+                      <a:r>
+                        <a:rPr lang="es-ES" sz="1100" u="none" strike="noStrike" dirty="0">
+                          <a:effectLst/>
+                        </a:rPr>
+                        <a:t> </a:t>
+                      </a:r>
+                      <a:r>
+                        <a:rPr lang="es-ES" sz="1100" u="none" strike="noStrike" dirty="0" err="1">
+                          <a:effectLst/>
+                        </a:rPr>
+                        <a:t>eLiquids</a:t>
+                      </a:r>
+                      <a:endParaRPr lang="es-ES" sz="1100" b="0" i="0" u="none" strike="noStrike" dirty="0">
                         <a:solidFill>
                           <a:srgbClr val="000000"/>
                         </a:solidFill>
@@ -4445,16 +4805,10 @@
                         <a:buNone/>
                       </a:pPr>
                       <a:r>
-                        <a:rPr lang="es-ES" sz="1100" u="none" strike="noStrike" dirty="0" err="1">
-                          <a:effectLst/>
-                        </a:rPr>
-                        <a:t>H2</a:t>
-                      </a:r>
-                      <a:r>
                         <a:rPr lang="es-ES" sz="1100" u="none" strike="noStrike" dirty="0">
                           <a:effectLst/>
                         </a:rPr>
-                        <a:t> Boiler</a:t>
+                        <a:t>H2 Boiler</a:t>
                       </a:r>
                       <a:endParaRPr lang="es-ES" sz="1100" b="0" i="0" u="none" strike="noStrike" dirty="0">
                         <a:solidFill>
@@ -4981,7 +5335,7 @@
 </p:sld>
 </file>
 
-<file path=ppt/slides/slide4.xml><?xml version="1.0" encoding="utf-8"?>
+<file path=ppt/slides/slide5.xml><?xml version="1.0" encoding="utf-8"?>
 <p:sld xmlns:a="http://schemas.openxmlformats.org/drawingml/2006/main" xmlns:r="http://schemas.openxmlformats.org/officeDocument/2006/relationships" xmlns:p="http://schemas.openxmlformats.org/presentationml/2006/main">
   <p:cSld>
     <p:spTree>
@@ -5071,9 +5425,6 @@
           <a:p>
             <a:r>
               <a:rPr lang="es-ES" dirty="0">
-                <a:solidFill>
-                  <a:schemeClr val="accent2"/>
-                </a:solidFill>
                 <a:latin typeface="Arial Rounded MT Bold" panose="020F0704030504030204" pitchFamily="34" charset="0"/>
               </a:rPr>
               <a:t>FRh2SW:</a:t>
@@ -5117,7 +5468,25 @@
                 </a:solidFill>
                 <a:latin typeface="Arial Rounded MT Bold" panose="020F0704030504030204" pitchFamily="34" charset="0"/>
               </a:rPr>
-              <a:t>demanda 1 = line flow ESh2 – FRh2SW (Irún Larrao)</a:t>
+              <a:t>demanda 1 = line flow ESh2 – FRh2SW (Irún </a:t>
+            </a:r>
+            <a:r>
+              <a:rPr lang="es-ES" sz="1600" dirty="0" err="1">
+                <a:solidFill>
+                  <a:srgbClr val="0070C0"/>
+                </a:solidFill>
+                <a:latin typeface="Arial Rounded MT Bold" panose="020F0704030504030204" pitchFamily="34" charset="0"/>
+              </a:rPr>
+              <a:t>LarraU</a:t>
+            </a:r>
+            <a:r>
+              <a:rPr lang="es-ES" sz="1600" dirty="0">
+                <a:solidFill>
+                  <a:srgbClr val="0070C0"/>
+                </a:solidFill>
+                <a:latin typeface="Arial Rounded MT Bold" panose="020F0704030504030204" pitchFamily="34" charset="0"/>
+              </a:rPr>
+              <a:t>)</a:t>
             </a:r>
           </a:p>
           <a:p>
@@ -5365,25 +5734,7 @@
                 </a:solidFill>
                 <a:latin typeface="Arial Rounded MT Bold" panose="020F0704030504030204" pitchFamily="34" charset="0"/>
               </a:rPr>
-              <a:t>Load 1: carga de </a:t>
-            </a:r>
-            <a:r>
-              <a:rPr lang="es-ES" sz="1600" dirty="0" err="1">
-                <a:solidFill>
-                  <a:srgbClr val="0070C0"/>
-                </a:solidFill>
-                <a:latin typeface="Arial Rounded MT Bold" panose="020F0704030504030204" pitchFamily="34" charset="0"/>
-              </a:rPr>
-              <a:t>h2</a:t>
-            </a:r>
-            <a:r>
-              <a:rPr lang="es-ES" sz="1600" dirty="0">
-                <a:solidFill>
-                  <a:srgbClr val="0070C0"/>
-                </a:solidFill>
-                <a:latin typeface="Arial Rounded MT Bold" panose="020F0704030504030204" pitchFamily="34" charset="0"/>
-              </a:rPr>
-              <a:t> </a:t>
+              <a:t>Load 1: carga de h2 </a:t>
             </a:r>
             <a:r>
               <a:rPr lang="es-ES" sz="1600" dirty="0" err="1">
@@ -5419,7 +5770,7 @@
 </p:sld>
 </file>
 
-<file path=ppt/slides/slide5.xml><?xml version="1.0" encoding="utf-8"?>
+<file path=ppt/slides/slide6.xml><?xml version="1.0" encoding="utf-8"?>
 <p:sld xmlns:a="http://schemas.openxmlformats.org/drawingml/2006/main" xmlns:r="http://schemas.openxmlformats.org/officeDocument/2006/relationships" xmlns:p="http://schemas.openxmlformats.org/presentationml/2006/main">
   <p:cSld>
     <p:bg>
@@ -5499,43 +5850,7 @@
                 </a:solidFill>
                 <a:latin typeface="Arial Rounded MT Bold" panose="020F0704030504030204" pitchFamily="34" charset="0"/>
               </a:rPr>
-              <a:t>La línea negra marca el flujo que será enviado del nodo FRh2SW al nodo FRh2S. La generación  del generador FRh2SW es el área de color azul (flujo a enviar-flujo </a:t>
-            </a:r>
-            <a:r>
-              <a:rPr lang="es-ES" sz="1600" dirty="0" err="1">
-                <a:solidFill>
-                  <a:srgbClr val="0070C0"/>
-                </a:solidFill>
-                <a:latin typeface="Arial Rounded MT Bold" panose="020F0704030504030204" pitchFamily="34" charset="0"/>
-              </a:rPr>
-              <a:t>irunlarrao-descarga+carga</a:t>
-            </a:r>
-            <a:r>
-              <a:rPr lang="es-ES" sz="1600" dirty="0">
-                <a:solidFill>
-                  <a:srgbClr val="0070C0"/>
-                </a:solidFill>
-                <a:latin typeface="Arial Rounded MT Bold" panose="020F0704030504030204" pitchFamily="34" charset="0"/>
-              </a:rPr>
-              <a:t>). En naranja el flujo (obligado) de </a:t>
-            </a:r>
-            <a:r>
-              <a:rPr lang="es-ES" sz="1600" dirty="0" err="1">
-                <a:solidFill>
-                  <a:srgbClr val="0070C0"/>
-                </a:solidFill>
-                <a:latin typeface="Arial Rounded MT Bold" panose="020F0704030504030204" pitchFamily="34" charset="0"/>
-              </a:rPr>
-              <a:t>h2</a:t>
-            </a:r>
-            <a:r>
-              <a:rPr lang="es-ES" sz="1600" dirty="0">
-                <a:solidFill>
-                  <a:srgbClr val="0070C0"/>
-                </a:solidFill>
-                <a:latin typeface="Arial Rounded MT Bold" panose="020F0704030504030204" pitchFamily="34" charset="0"/>
-              </a:rPr>
-              <a:t> enviado desde ESh2. en verde la generación debida a la descarga de las baterías.</a:t>
+              <a:t>La línea negra marca el flujo que será enviado del nodo FRh2SW al nodo FRh2S. La generación  del generador FRh2SW es el área de color azul (flujo a enviar-flujo irunlarrao-descarga+carga). En naranja el flujo (obligado) de h2 enviado desde ESh2. en verde la generación debida a la descarga de las baterías.</a:t>
             </a:r>
             <a:endParaRPr lang="es-ES" sz="1600" dirty="0"/>
           </a:p>
@@ -5543,10 +5858,10 @@
       </p:sp>
       <p:pic>
         <p:nvPicPr>
-          <p:cNvPr id="17" name="Imagen 16">
-            <a:extLst>
-              <a:ext uri="{FF2B5EF4-FFF2-40B4-BE49-F238E27FC236}">
-                <a16:creationId xmlns:a16="http://schemas.microsoft.com/office/drawing/2014/main" id="{52FAB9C5-6A58-1A30-062B-E250371FFB6A}"/>
+          <p:cNvPr id="3" name="Imagen 2">
+            <a:extLst>
+              <a:ext uri="{FF2B5EF4-FFF2-40B4-BE49-F238E27FC236}">
+                <a16:creationId xmlns:a16="http://schemas.microsoft.com/office/drawing/2014/main" id="{A4C2A50D-06F9-7CD9-79E0-737F92AFEC69}"/>
               </a:ext>
             </a:extLst>
           </p:cNvPr>
@@ -5557,14 +5872,15 @@
         </p:nvPicPr>
         <p:blipFill>
           <a:blip r:embed="rId2"/>
+          <a:srcRect t="1631"/>
           <a:stretch>
             <a:fillRect/>
           </a:stretch>
         </p:blipFill>
         <p:spPr>
           <a:xfrm>
-            <a:off x="2108064" y="1790872"/>
-            <a:ext cx="7416936" cy="4840620"/>
+            <a:off x="1830945" y="1790872"/>
+            <a:ext cx="8530110" cy="4491667"/>
           </a:xfrm>
           <a:prstGeom prst="rect">
             <a:avLst/>

--- a/hojas_de_datos/presentación.pptx
+++ b/hojas_de_datos/presentación.pptx
@@ -296,7 +296,7 @@
                 <a:latin typeface="Verdana" panose="020B0604030504040204" pitchFamily="34" charset="0"/>
               </a:rPr>
               <a:pPr/>
-              <a:t>21/05/2026</a:t>
+              <a:t>22/05/2026</a:t>
             </a:fld>
             <a:endParaRPr lang="es-ES_tradnl">
               <a:latin typeface="Verdana" panose="020B0604030504040204" pitchFamily="34" charset="0"/>
@@ -475,7 +475,7 @@
             <a:fld id="{1B1655B4-8907-4DA8-B699-724CD93370C9}" type="datetimeFigureOut">
               <a:rPr lang="es-ES_tradnl" smtClean="0"/>
               <a:pPr/>
-              <a:t>21/05/2026</a:t>
+              <a:t>22/05/2026</a:t>
             </a:fld>
             <a:endParaRPr lang="es-ES_tradnl"/>
           </a:p>
@@ -16102,8 +16102,8 @@
           </a:p>
         </p:txBody>
       </p:sp>
-      <mc:AlternateContent xmlns:mc="http://schemas.openxmlformats.org/markup-compatibility/2006">
-        <mc:Choice xmlns:a14="http://schemas.microsoft.com/office/drawing/2010/main" Requires="a14">
+      <mc:AlternateContent xmlns:mc="http://schemas.openxmlformats.org/markup-compatibility/2006" xmlns:a14="http://schemas.microsoft.com/office/drawing/2010/main">
+        <mc:Choice Requires="a14">
           <p:sp>
             <p:nvSpPr>
               <p:cNvPr id="16" name="Marcador de texto 8">
@@ -16450,19 +16450,7 @@
                       <a:rPr lang="es-ES" b="0" i="1" dirty="0" smtClean="0">
                         <a:latin typeface="Cambria Math" panose="02040503050406030204" pitchFamily="18" charset="0"/>
                       </a:rPr>
-                      <m:t>)≥</m:t>
-                    </m:r>
-                    <m:r>
-                      <a:rPr lang="es-ES" b="0" i="1" dirty="0" smtClean="0">
-                        <a:latin typeface="Cambria Math" panose="02040503050406030204" pitchFamily="18" charset="0"/>
-                      </a:rPr>
-                      <m:t>2</m:t>
-                    </m:r>
-                    <m:r>
-                      <a:rPr lang="es-ES" b="0" i="1" dirty="0" smtClean="0">
-                        <a:latin typeface="Cambria Math" panose="02040503050406030204" pitchFamily="18" charset="0"/>
-                      </a:rPr>
-                      <m:t>0%</m:t>
+                      <m:t>)≥20%</m:t>
                     </m:r>
                   </m:oMath>
                 </a14:m>
@@ -16474,7 +16462,7 @@
             </p:txBody>
           </p:sp>
         </mc:Choice>
-        <mc:Fallback>
+        <mc:Fallback xmlns="">
           <p:sp>
             <p:nvSpPr>
               <p:cNvPr id="16" name="Marcador de texto 8">
@@ -28505,6 +28493,17 @@
 </file>
 
 <file path=customXml/item1.xml><?xml version="1.0" encoding="utf-8"?>
+<p:properties xmlns:p="http://schemas.microsoft.com/office/2006/metadata/properties" xmlns:xsi="http://www.w3.org/2001/XMLSchema-instance" xmlns:pc="http://schemas.microsoft.com/office/infopath/2007/PartnerControls">
+  <documentManagement>
+    <lcf76f155ced4ddcb4097134ff3c332f xmlns="1841eac5-b4b0-4244-b60a-f629dbdcb0cc">
+      <Terms xmlns="http://schemas.microsoft.com/office/infopath/2007/PartnerControls"/>
+    </lcf76f155ced4ddcb4097134ff3c332f>
+    <TaxCatchAll xmlns="779a45df-2b94-4221-a031-b06477108c1e" xsi:nil="true"/>
+  </documentManagement>
+</p:properties>
+</file>
+
+<file path=customXml/item2.xml><?xml version="1.0" encoding="utf-8"?>
 <?mso-contentType ?>
 <FormTemplates xmlns="http://schemas.microsoft.com/sharepoint/v3/contenttype/forms">
   <Display>DocumentLibraryForm</Display>
@@ -28513,7 +28512,7 @@
 </FormTemplates>
 </file>
 
-<file path=customXml/item2.xml><?xml version="1.0" encoding="utf-8"?>
+<file path=customXml/item3.xml><?xml version="1.0" encoding="utf-8"?>
 <ct:contentTypeSchema xmlns:ct="http://schemas.microsoft.com/office/2006/metadata/contentType" xmlns:ma="http://schemas.microsoft.com/office/2006/metadata/properties/metaAttributes" ct:_="" ma:_="" ma:contentTypeName="Documento" ma:contentTypeID="0x0101003C8A6744A6DACA4A85F5717C91CAF9DF" ma:contentTypeVersion="11" ma:contentTypeDescription="Crear nuevo documento." ma:contentTypeScope="" ma:versionID="42cd996d4ababeb757980679842f76ac">
   <xsd:schema xmlns:xsd="http://www.w3.org/2001/XMLSchema" xmlns:xs="http://www.w3.org/2001/XMLSchema" xmlns:p="http://schemas.microsoft.com/office/2006/metadata/properties" xmlns:ns2="1841eac5-b4b0-4244-b60a-f629dbdcb0cc" xmlns:ns3="779a45df-2b94-4221-a031-b06477108c1e" targetNamespace="http://schemas.microsoft.com/office/2006/metadata/properties" ma:root="true" ma:fieldsID="a0d098d53da39906cc42df1f6f8a2fa4" ns2:_="" ns3:_="">
     <xsd:import namespace="1841eac5-b4b0-4244-b60a-f629dbdcb0cc"/>
@@ -28708,18 +28707,24 @@
 </ct:contentTypeSchema>
 </file>
 
-<file path=customXml/item3.xml><?xml version="1.0" encoding="utf-8"?>
-<p:properties xmlns:p="http://schemas.microsoft.com/office/2006/metadata/properties" xmlns:xsi="http://www.w3.org/2001/XMLSchema-instance" xmlns:pc="http://schemas.microsoft.com/office/infopath/2007/PartnerControls">
-  <documentManagement>
-    <lcf76f155ced4ddcb4097134ff3c332f xmlns="1841eac5-b4b0-4244-b60a-f629dbdcb0cc">
-      <Terms xmlns="http://schemas.microsoft.com/office/infopath/2007/PartnerControls"/>
-    </lcf76f155ced4ddcb4097134ff3c332f>
-    <TaxCatchAll xmlns="779a45df-2b94-4221-a031-b06477108c1e" xsi:nil="true"/>
-  </documentManagement>
-</p:properties>
+<file path=customXml/itemProps1.xml><?xml version="1.0" encoding="utf-8"?>
+<ds:datastoreItem xmlns:ds="http://schemas.openxmlformats.org/officeDocument/2006/customXml" ds:itemID="{0631F27C-6E9E-417F-B2FD-B2DC2B14F772}">
+  <ds:schemaRefs>
+    <ds:schemaRef ds:uri="http://purl.org/dc/elements/1.1/"/>
+    <ds:schemaRef ds:uri="http://schemas.microsoft.com/office/2006/metadata/properties"/>
+    <ds:schemaRef ds:uri="779a45df-2b94-4221-a031-b06477108c1e"/>
+    <ds:schemaRef ds:uri="1841eac5-b4b0-4244-b60a-f629dbdcb0cc"/>
+    <ds:schemaRef ds:uri="http://purl.org/dc/dcmitype/"/>
+    <ds:schemaRef ds:uri="http://www.w3.org/XML/1998/namespace"/>
+    <ds:schemaRef ds:uri="http://schemas.microsoft.com/office/2006/documentManagement/types"/>
+    <ds:schemaRef ds:uri="http://schemas.microsoft.com/office/infopath/2007/PartnerControls"/>
+    <ds:schemaRef ds:uri="http://schemas.openxmlformats.org/package/2006/metadata/core-properties"/>
+    <ds:schemaRef ds:uri="http://purl.org/dc/terms/"/>
+  </ds:schemaRefs>
+</ds:datastoreItem>
 </file>
 
-<file path=customXml/itemProps1.xml><?xml version="1.0" encoding="utf-8"?>
+<file path=customXml/itemProps2.xml><?xml version="1.0" encoding="utf-8"?>
 <ds:datastoreItem xmlns:ds="http://schemas.openxmlformats.org/officeDocument/2006/customXml" ds:itemID="{E93EC387-034B-467B-B689-C474C0F6BCF3}">
   <ds:schemaRefs>
     <ds:schemaRef ds:uri="http://schemas.microsoft.com/sharepoint/v3/contenttype/forms"/>
@@ -28727,7 +28732,7 @@
 </ds:datastoreItem>
 </file>
 
-<file path=customXml/itemProps2.xml><?xml version="1.0" encoding="utf-8"?>
+<file path=customXml/itemProps3.xml><?xml version="1.0" encoding="utf-8"?>
 <ds:datastoreItem xmlns:ds="http://schemas.openxmlformats.org/officeDocument/2006/customXml" ds:itemID="{085BF74C-44D6-4605-A98C-D192D7559C5D}">
   <ds:schemaRefs>
     <ds:schemaRef ds:uri="http://schemas.microsoft.com/office/2006/metadata/contentType"/>
@@ -28744,21 +28749,4 @@
     <ds:schemaRef ds:uri="http://schemas.microsoft.com/internal/obd"/>
   </ds:schemaRefs>
 </ds:datastoreItem>
-</file>
-
-<file path=customXml/itemProps3.xml><?xml version="1.0" encoding="utf-8"?>
-<ds:datastoreItem xmlns:ds="http://schemas.openxmlformats.org/officeDocument/2006/customXml" ds:itemID="{0631F27C-6E9E-417F-B2FD-B2DC2B14F772}">
-  <ds:schemaRefs>
-    <ds:schemaRef ds:uri="http://purl.org/dc/elements/1.1/"/>
-    <ds:schemaRef ds:uri="http://schemas.microsoft.com/office/2006/metadata/properties"/>
-    <ds:schemaRef ds:uri="779a45df-2b94-4221-a031-b06477108c1e"/>
-    <ds:schemaRef ds:uri="1841eac5-b4b0-4244-b60a-f629dbdcb0cc"/>
-    <ds:schemaRef ds:uri="http://purl.org/dc/dcmitype/"/>
-    <ds:schemaRef ds:uri="http://www.w3.org/XML/1998/namespace"/>
-    <ds:schemaRef ds:uri="http://schemas.microsoft.com/office/2006/documentManagement/types"/>
-    <ds:schemaRef ds:uri="http://schemas.microsoft.com/office/infopath/2007/PartnerControls"/>
-    <ds:schemaRef ds:uri="http://schemas.openxmlformats.org/package/2006/metadata/core-properties"/>
-    <ds:schemaRef ds:uri="http://purl.org/dc/terms/"/>
-  </ds:schemaRefs>
-</ds:datastoreItem>
 </file>
--- a/hojas_de_datos/presentación.pptx
+++ b/hojas_de_datos/presentación.pptx
@@ -296,7 +296,7 @@
                 <a:latin typeface="Verdana" panose="020B0604030504040204" pitchFamily="34" charset="0"/>
               </a:rPr>
               <a:pPr/>
-              <a:t>22/05/2026</a:t>
+              <a:t>04/06/2026</a:t>
             </a:fld>
             <a:endParaRPr lang="es-ES_tradnl">
               <a:latin typeface="Verdana" panose="020B0604030504040204" pitchFamily="34" charset="0"/>
@@ -475,7 +475,7 @@
             <a:fld id="{1B1655B4-8907-4DA8-B699-724CD93370C9}" type="datetimeFigureOut">
               <a:rPr lang="es-ES_tradnl" smtClean="0"/>
               <a:pPr/>
-              <a:t>22/05/2026</a:t>
+              <a:t>04/06/2026</a:t>
             </a:fld>
             <a:endParaRPr lang="es-ES_tradnl"/>
           </a:p>
@@ -16507,96 +16507,6 @@
           </p:sp>
         </mc:Fallback>
       </mc:AlternateContent>
-      <p:pic>
-        <p:nvPicPr>
-          <p:cNvPr id="25" name="Imagen 24">
-            <a:extLst>
-              <a:ext uri="{FF2B5EF4-FFF2-40B4-BE49-F238E27FC236}">
-                <a16:creationId xmlns:a16="http://schemas.microsoft.com/office/drawing/2014/main" id="{14905CE9-AA58-1B30-5C84-B09A0AF379BF}"/>
-              </a:ext>
-            </a:extLst>
-          </p:cNvPr>
-          <p:cNvPicPr>
-            <a:picLocks noChangeAspect="1"/>
-          </p:cNvPicPr>
-          <p:nvPr/>
-        </p:nvPicPr>
-        <p:blipFill>
-          <a:blip r:embed="rId3"/>
-          <a:stretch>
-            <a:fillRect/>
-          </a:stretch>
-        </p:blipFill>
-        <p:spPr>
-          <a:xfrm>
-            <a:off x="432000" y="2235806"/>
-            <a:ext cx="2587900" cy="2263182"/>
-          </a:xfrm>
-          <a:prstGeom prst="rect">
-            <a:avLst/>
-          </a:prstGeom>
-        </p:spPr>
-      </p:pic>
-      <p:pic>
-        <p:nvPicPr>
-          <p:cNvPr id="27" name="Imagen 26">
-            <a:extLst>
-              <a:ext uri="{FF2B5EF4-FFF2-40B4-BE49-F238E27FC236}">
-                <a16:creationId xmlns:a16="http://schemas.microsoft.com/office/drawing/2014/main" id="{4CD1DFFB-E193-FA35-78F7-E158D65DEC28}"/>
-              </a:ext>
-            </a:extLst>
-          </p:cNvPr>
-          <p:cNvPicPr>
-            <a:picLocks noChangeAspect="1"/>
-          </p:cNvPicPr>
-          <p:nvPr/>
-        </p:nvPicPr>
-        <p:blipFill>
-          <a:blip r:embed="rId4"/>
-          <a:stretch>
-            <a:fillRect/>
-          </a:stretch>
-        </p:blipFill>
-        <p:spPr>
-          <a:xfrm>
-            <a:off x="3278050" y="2235805"/>
-            <a:ext cx="2587900" cy="2263183"/>
-          </a:xfrm>
-          <a:prstGeom prst="rect">
-            <a:avLst/>
-          </a:prstGeom>
-        </p:spPr>
-      </p:pic>
-      <p:pic>
-        <p:nvPicPr>
-          <p:cNvPr id="29" name="Imagen 28">
-            <a:extLst>
-              <a:ext uri="{FF2B5EF4-FFF2-40B4-BE49-F238E27FC236}">
-                <a16:creationId xmlns:a16="http://schemas.microsoft.com/office/drawing/2014/main" id="{991FACAE-172C-7879-B48B-9CBFD5527C7A}"/>
-              </a:ext>
-            </a:extLst>
-          </p:cNvPr>
-          <p:cNvPicPr>
-            <a:picLocks noChangeAspect="1"/>
-          </p:cNvPicPr>
-          <p:nvPr/>
-        </p:nvPicPr>
-        <p:blipFill>
-          <a:blip r:embed="rId5"/>
-          <a:stretch>
-            <a:fillRect/>
-          </a:stretch>
-        </p:blipFill>
-        <p:spPr>
-          <a:xfrm>
-            <a:off x="6010552" y="2235804"/>
-            <a:ext cx="2587900" cy="2263183"/>
-          </a:xfrm>
-          <a:prstGeom prst="rect">
-            <a:avLst/>
-          </a:prstGeom>
-        </p:spPr>
-      </p:pic>
     </p:spTree>
     <p:extLst>
       <p:ext uri="{BB962C8B-B14F-4D97-AF65-F5344CB8AC3E}">
@@ -26394,10 +26304,10 @@
       </p:sp>
       <p:pic>
         <p:nvPicPr>
-          <p:cNvPr id="8" name="Imagen 7">
-            <a:extLst>
-              <a:ext uri="{FF2B5EF4-FFF2-40B4-BE49-F238E27FC236}">
-                <a16:creationId xmlns:a16="http://schemas.microsoft.com/office/drawing/2014/main" id="{CBA89143-51E2-80D0-46DE-6C6D8ECB44A7}"/>
+          <p:cNvPr id="4" name="Imagen 3">
+            <a:extLst>
+              <a:ext uri="{FF2B5EF4-FFF2-40B4-BE49-F238E27FC236}">
+                <a16:creationId xmlns:a16="http://schemas.microsoft.com/office/drawing/2014/main" id="{6B2E4AC3-DFF2-CB32-0B72-FDBCFD415580}"/>
               </a:ext>
             </a:extLst>
           </p:cNvPr>
@@ -26414,8 +26324,8 @@
         </p:blipFill>
         <p:spPr>
           <a:xfrm>
-            <a:off x="2912390" y="931011"/>
-            <a:ext cx="3319220" cy="3810000"/>
+            <a:off x="2738677" y="869464"/>
+            <a:ext cx="3326988" cy="3635043"/>
           </a:xfrm>
           <a:prstGeom prst="rect">
             <a:avLst/>
@@ -28493,26 +28403,6 @@
 </file>
 
 <file path=customXml/item1.xml><?xml version="1.0" encoding="utf-8"?>
-<p:properties xmlns:p="http://schemas.microsoft.com/office/2006/metadata/properties" xmlns:xsi="http://www.w3.org/2001/XMLSchema-instance" xmlns:pc="http://schemas.microsoft.com/office/infopath/2007/PartnerControls">
-  <documentManagement>
-    <lcf76f155ced4ddcb4097134ff3c332f xmlns="1841eac5-b4b0-4244-b60a-f629dbdcb0cc">
-      <Terms xmlns="http://schemas.microsoft.com/office/infopath/2007/PartnerControls"/>
-    </lcf76f155ced4ddcb4097134ff3c332f>
-    <TaxCatchAll xmlns="779a45df-2b94-4221-a031-b06477108c1e" xsi:nil="true"/>
-  </documentManagement>
-</p:properties>
-</file>
-
-<file path=customXml/item2.xml><?xml version="1.0" encoding="utf-8"?>
-<?mso-contentType ?>
-<FormTemplates xmlns="http://schemas.microsoft.com/sharepoint/v3/contenttype/forms">
-  <Display>DocumentLibraryForm</Display>
-  <Edit>DocumentLibraryForm</Edit>
-  <New>DocumentLibraryForm</New>
-</FormTemplates>
-</file>
-
-<file path=customXml/item3.xml><?xml version="1.0" encoding="utf-8"?>
 <ct:contentTypeSchema xmlns:ct="http://schemas.microsoft.com/office/2006/metadata/contentType" xmlns:ma="http://schemas.microsoft.com/office/2006/metadata/properties/metaAttributes" ct:_="" ma:_="" ma:contentTypeName="Documento" ma:contentTypeID="0x0101003C8A6744A6DACA4A85F5717C91CAF9DF" ma:contentTypeVersion="11" ma:contentTypeDescription="Crear nuevo documento." ma:contentTypeScope="" ma:versionID="42cd996d4ababeb757980679842f76ac">
   <xsd:schema xmlns:xsd="http://www.w3.org/2001/XMLSchema" xmlns:xs="http://www.w3.org/2001/XMLSchema" xmlns:p="http://schemas.microsoft.com/office/2006/metadata/properties" xmlns:ns2="1841eac5-b4b0-4244-b60a-f629dbdcb0cc" xmlns:ns3="779a45df-2b94-4221-a031-b06477108c1e" targetNamespace="http://schemas.microsoft.com/office/2006/metadata/properties" ma:root="true" ma:fieldsID="a0d098d53da39906cc42df1f6f8a2fa4" ns2:_="" ns3:_="">
     <xsd:import namespace="1841eac5-b4b0-4244-b60a-f629dbdcb0cc"/>
@@ -28707,7 +28597,46 @@
 </ct:contentTypeSchema>
 </file>
 
+<file path=customXml/item2.xml><?xml version="1.0" encoding="utf-8"?>
+<p:properties xmlns:p="http://schemas.microsoft.com/office/2006/metadata/properties" xmlns:xsi="http://www.w3.org/2001/XMLSchema-instance" xmlns:pc="http://schemas.microsoft.com/office/infopath/2007/PartnerControls">
+  <documentManagement>
+    <lcf76f155ced4ddcb4097134ff3c332f xmlns="1841eac5-b4b0-4244-b60a-f629dbdcb0cc">
+      <Terms xmlns="http://schemas.microsoft.com/office/infopath/2007/PartnerControls"/>
+    </lcf76f155ced4ddcb4097134ff3c332f>
+    <TaxCatchAll xmlns="779a45df-2b94-4221-a031-b06477108c1e" xsi:nil="true"/>
+  </documentManagement>
+</p:properties>
+</file>
+
+<file path=customXml/item3.xml><?xml version="1.0" encoding="utf-8"?>
+<?mso-contentType ?>
+<FormTemplates xmlns="http://schemas.microsoft.com/sharepoint/v3/contenttype/forms">
+  <Display>DocumentLibraryForm</Display>
+  <Edit>DocumentLibraryForm</Edit>
+  <New>DocumentLibraryForm</New>
+</FormTemplates>
+</file>
+
 <file path=customXml/itemProps1.xml><?xml version="1.0" encoding="utf-8"?>
+<ds:datastoreItem xmlns:ds="http://schemas.openxmlformats.org/officeDocument/2006/customXml" ds:itemID="{085BF74C-44D6-4605-A98C-D192D7559C5D}">
+  <ds:schemaRefs>
+    <ds:schemaRef ds:uri="http://schemas.microsoft.com/office/2006/metadata/contentType"/>
+    <ds:schemaRef ds:uri="http://schemas.microsoft.com/office/2006/metadata/properties/metaAttributes"/>
+    <ds:schemaRef ds:uri="http://www.w3.org/2001/XMLSchema"/>
+    <ds:schemaRef ds:uri="http://schemas.microsoft.com/office/2006/metadata/properties"/>
+    <ds:schemaRef ds:uri="1841eac5-b4b0-4244-b60a-f629dbdcb0cc"/>
+    <ds:schemaRef ds:uri="779a45df-2b94-4221-a031-b06477108c1e"/>
+    <ds:schemaRef ds:uri="http://schemas.microsoft.com/office/2006/documentManagement/types"/>
+    <ds:schemaRef ds:uri="http://schemas.microsoft.com/office/infopath/2007/PartnerControls"/>
+    <ds:schemaRef ds:uri="http://schemas.openxmlformats.org/package/2006/metadata/core-properties"/>
+    <ds:schemaRef ds:uri="http://purl.org/dc/elements/1.1/"/>
+    <ds:schemaRef ds:uri="http://purl.org/dc/terms/"/>
+    <ds:schemaRef ds:uri="http://schemas.microsoft.com/internal/obd"/>
+  </ds:schemaRefs>
+</ds:datastoreItem>
+</file>
+
+<file path=customXml/itemProps2.xml><?xml version="1.0" encoding="utf-8"?>
 <ds:datastoreItem xmlns:ds="http://schemas.openxmlformats.org/officeDocument/2006/customXml" ds:itemID="{0631F27C-6E9E-417F-B2FD-B2DC2B14F772}">
   <ds:schemaRefs>
     <ds:schemaRef ds:uri="http://purl.org/dc/elements/1.1/"/>
@@ -28724,29 +28653,10 @@
 </ds:datastoreItem>
 </file>
 
-<file path=customXml/itemProps2.xml><?xml version="1.0" encoding="utf-8"?>
+<file path=customXml/itemProps3.xml><?xml version="1.0" encoding="utf-8"?>
 <ds:datastoreItem xmlns:ds="http://schemas.openxmlformats.org/officeDocument/2006/customXml" ds:itemID="{E93EC387-034B-467B-B689-C474C0F6BCF3}">
   <ds:schemaRefs>
     <ds:schemaRef ds:uri="http://schemas.microsoft.com/sharepoint/v3/contenttype/forms"/>
   </ds:schemaRefs>
 </ds:datastoreItem>
-</file>
-
-<file path=customXml/itemProps3.xml><?xml version="1.0" encoding="utf-8"?>
-<ds:datastoreItem xmlns:ds="http://schemas.openxmlformats.org/officeDocument/2006/customXml" ds:itemID="{085BF74C-44D6-4605-A98C-D192D7559C5D}">
-  <ds:schemaRefs>
-    <ds:schemaRef ds:uri="http://schemas.microsoft.com/office/2006/metadata/contentType"/>
-    <ds:schemaRef ds:uri="http://schemas.microsoft.com/office/2006/metadata/properties/metaAttributes"/>
-    <ds:schemaRef ds:uri="http://www.w3.org/2001/XMLSchema"/>
-    <ds:schemaRef ds:uri="http://schemas.microsoft.com/office/2006/metadata/properties"/>
-    <ds:schemaRef ds:uri="1841eac5-b4b0-4244-b60a-f629dbdcb0cc"/>
-    <ds:schemaRef ds:uri="779a45df-2b94-4221-a031-b06477108c1e"/>
-    <ds:schemaRef ds:uri="http://schemas.microsoft.com/office/2006/documentManagement/types"/>
-    <ds:schemaRef ds:uri="http://schemas.microsoft.com/office/infopath/2007/PartnerControls"/>
-    <ds:schemaRef ds:uri="http://schemas.openxmlformats.org/package/2006/metadata/core-properties"/>
-    <ds:schemaRef ds:uri="http://purl.org/dc/elements/1.1/"/>
-    <ds:schemaRef ds:uri="http://purl.org/dc/terms/"/>
-    <ds:schemaRef ds:uri="http://schemas.microsoft.com/internal/obd"/>
-  </ds:schemaRefs>
-</ds:datastoreItem>
 </file>